--- a/assets/pptx/catalog-528.pptx
+++ b/assets/pptx/catalog-528.pptx
@@ -3292,7 +3292,7 @@
                 <a:ea typeface="Ebrima"/>
                 <a:cs typeface="Ebrima"/>
               </a:rPr>
-              <a:t>(2x)</a:t>
+              <a:t>2x</a:t>
             </a:r>
           </a:p>
         </p:txBody>
@@ -3493,7 +3493,7 @@
                 <a:ea typeface="Ebrima"/>
                 <a:cs typeface="Ebrima"/>
               </a:rPr>
-              <a:t>(2x)</a:t>
+              <a:t>2x</a:t>
             </a:r>
           </a:p>
         </p:txBody>
@@ -3761,7 +3761,7 @@
                 <a:ea typeface="Ebrima"/>
                 <a:cs typeface="Ebrima"/>
               </a:rPr>
-              <a:t>(2x)</a:t>
+              <a:t>2x</a:t>
             </a:r>
           </a:p>
         </p:txBody>
@@ -4029,7 +4029,7 @@
                 <a:ea typeface="Ebrima"/>
                 <a:cs typeface="Ebrima"/>
               </a:rPr>
-              <a:t>(2x)</a:t>
+              <a:t>2x</a:t>
             </a:r>
           </a:p>
         </p:txBody>
@@ -4230,7 +4230,7 @@
                 <a:ea typeface="Ebrima"/>
                 <a:cs typeface="Ebrima"/>
               </a:rPr>
-              <a:t>(2x)</a:t>
+              <a:t>2x</a:t>
             </a:r>
           </a:p>
         </p:txBody>
@@ -4431,7 +4431,7 @@
                 <a:ea typeface="Ebrima"/>
                 <a:cs typeface="Ebrima"/>
               </a:rPr>
-              <a:t>(2x)</a:t>
+              <a:t>2x</a:t>
             </a:r>
           </a:p>
         </p:txBody>
@@ -4766,7 +4766,7 @@
                 <a:ea typeface="Ebrima"/>
                 <a:cs typeface="Ebrima"/>
               </a:rPr>
-              <a:t>(2x)</a:t>
+              <a:t>2x</a:t>
             </a:r>
           </a:p>
         </p:txBody>
@@ -4967,7 +4967,7 @@
                 <a:ea typeface="Ebrima"/>
                 <a:cs typeface="Ebrima"/>
               </a:rPr>
-              <a:t>(2x)</a:t>
+              <a:t>2x</a:t>
             </a:r>
           </a:p>
         </p:txBody>
@@ -5168,7 +5168,7 @@
                 <a:ea typeface="Ebrima"/>
                 <a:cs typeface="Ebrima"/>
               </a:rPr>
-              <a:t>(2x)</a:t>
+              <a:t>2x</a:t>
             </a:r>
           </a:p>
         </p:txBody>
@@ -5369,7 +5369,7 @@
                 <a:ea typeface="Ebrima"/>
                 <a:cs typeface="Ebrima"/>
               </a:rPr>
-              <a:t>(2x)</a:t>
+              <a:t>2x</a:t>
             </a:r>
           </a:p>
         </p:txBody>
@@ -5436,7 +5436,7 @@
                 <a:ea typeface="Ebrima"/>
                 <a:cs typeface="Ebrima"/>
               </a:rPr>
-              <a:t>(2x)</a:t>
+              <a:t>2x</a:t>
             </a:r>
           </a:p>
         </p:txBody>
@@ -5704,7 +5704,7 @@
                 <a:ea typeface="Ebrima"/>
                 <a:cs typeface="Ebrima"/>
               </a:rPr>
-              <a:t>(2x)</a:t>
+              <a:t>2x</a:t>
             </a:r>
           </a:p>
         </p:txBody>
@@ -5905,7 +5905,7 @@
                 <a:ea typeface="Ebrima"/>
                 <a:cs typeface="Ebrima"/>
               </a:rPr>
-              <a:t>(2x)</a:t>
+              <a:t>2x</a:t>
             </a:r>
           </a:p>
         </p:txBody>
@@ -6106,7 +6106,7 @@
                 <a:ea typeface="Ebrima"/>
                 <a:cs typeface="Ebrima"/>
               </a:rPr>
-              <a:t>(2x)</a:t>
+              <a:t>2x</a:t>
             </a:r>
           </a:p>
         </p:txBody>
@@ -6374,7 +6374,7 @@
                 <a:ea typeface="Ebrima"/>
                 <a:cs typeface="Ebrima"/>
               </a:rPr>
-              <a:t>(2x)</a:t>
+              <a:t>2x</a:t>
             </a:r>
           </a:p>
         </p:txBody>
@@ -6575,7 +6575,7 @@
                 <a:ea typeface="Ebrima"/>
                 <a:cs typeface="Ebrima"/>
               </a:rPr>
-              <a:t>(2x)</a:t>
+              <a:t>2x</a:t>
             </a:r>
           </a:p>
         </p:txBody>
